--- a/samples/gtm-plan-acme-insight-studio.pptx
+++ b/samples/gtm-plan-acme-insight-studio.pptx
@@ -4505,7 +4505,7 @@
               </a:defRPr>
             </a:pPr>
             <a:r>
-              <a:t>Already where users work: Outlook, Teams, Word</a:t>
+              <a:t>Already where users work: email, chat, docs</a:t>
             </a:r>
           </a:p>
         </p:txBody>
@@ -4649,7 +4649,7 @@
               </a:defRPr>
             </a:pPr>
             <a:r>
-              <a:t>10x faster with Copilot Studio + connectors</a:t>
+              <a:t>10x faster with ACME Studio + connectors</a:t>
             </a:r>
           </a:p>
         </p:txBody>

--- a/samples/gtm-plan-acme-insight-studio.pptx
+++ b/samples/gtm-plan-acme-insight-studio.pptx
@@ -3637,7 +3637,7 @@
               </a:defRPr>
             </a:pPr>
             <a:r>
-              <a:t>The $12B Extensibility Opportunity Is Ours to Capture</a:t>
+              <a:t>The $12B Platform Integration Opportunity Is Ours to Capture</a:t>
             </a:r>
           </a:p>
         </p:txBody>
@@ -3898,7 +3898,7 @@
               </a:defRPr>
             </a:pPr>
             <a:r>
-              <a:t>AI extensibility segment addressable (SAM)</a:t>
+              <a:t>AI platform integration segment addressable (SAM)</a:t>
             </a:r>
           </a:p>
         </p:txBody>
@@ -4123,7 +4123,7 @@
               </a:defRPr>
             </a:pPr>
             <a:r>
-              <a:t>  Competitors 6-12 months behind on enterprise extensibility</a:t>
+              <a:t>  Competitors 6-12 months behind on enterprise platform integration</a:t>
             </a:r>
           </a:p>
         </p:txBody>
@@ -4276,7 +4276,7 @@
               </a:defRPr>
             </a:pPr>
             <a:r>
-              <a:t>Ship AI agents that reach 200M+ users</a:t>
+              <a:t>Ship AI agents that reach 20M+ users</a:t>
             </a:r>
             <a:br/>
             <a:r>
@@ -4433,7 +4433,7 @@
               </a:defRPr>
             </a:pPr>
             <a:r>
-              <a:t>Native ACME Graph, enterprise identity, compliance</a:t>
+              <a:t>Native ACME Platform, enterprise identity, compliance</a:t>
             </a:r>
           </a:p>
         </p:txBody>
@@ -7147,7 +7147,7 @@
               </a:defRPr>
             </a:pPr>
             <a:r>
-              <a:t>of Copilot deals  (Monthly)</a:t>
+              <a:t>of ACME platform deals  (Monthly)</a:t>
             </a:r>
           </a:p>
         </p:txBody>
